--- a/vdom-mount/vdom-mount.pptx
+++ b/vdom-mount/vdom-mount.pptx
@@ -243,7 +243,7 @@
           <a:p>
             <a:fld id="{80680FBE-A8DF-4758-9AC4-3A9E1039168F}" type="datetimeFigureOut">
               <a:rPr lang="en-US" smtClean="0"/>
-              <a:t>11/05/2026</a:t>
+              <a:t>12/05/2026</a:t>
             </a:fld>
             <a:endParaRPr lang="en-US" dirty="0"/>
           </a:p>
@@ -408,7 +408,7 @@
           <a:p>
             <a:fld id="{EC13577B-6902-467D-A26C-08A0DD5E4E03}" type="datetimeFigureOut">
               <a:rPr lang="en-US" smtClean="0"/>
-              <a:t>11/05/2026</a:t>
+              <a:t>12/05/2026</a:t>
             </a:fld>
             <a:endParaRPr lang="en-US" dirty="0"/>
           </a:p>
@@ -724,6 +724,18 @@
           <a:bodyPr/>
           <a:lstStyle/>
           <a:p>
+            <a:r>
+              <a:rPr lang="en-US" sz="1200" b="0" i="0" kern="1200" dirty="0">
+                <a:solidFill>
+                  <a:schemeClr val="tx1"/>
+                </a:solidFill>
+                <a:effectLst/>
+                <a:latin typeface="+mn-lt"/>
+                <a:ea typeface="+mn-ea"/>
+                <a:cs typeface="+mn-cs"/>
+              </a:rPr>
+              <a:t>https://play.vuejs.org/#__PROD__eNqlVc1q20AQfpWpLnLAkfJ3KK4T2qQ5pJAm9Oemi6wdO0qkXbG7chyCoYVC+wal7a3QUym0hYDyNnqUzu5Kjh2SkFBdtDvzzc438420596zogjGJXo9r68SmRYaFOqy2Io4QJoXQmrYOUozBkMpcvCD0O5MiD8HOQeJQ5g2oNaZCK7ovCNxOsziEWwaUGcYZwqXIt4PXT7KRBuNeZHFGm3evss4Xk6Hm5HXxkfeVt9ld6BBqbXg8DTJ0uRkDkd5Hs3F2PwhF9q8+6GLMif0w7mkXtfTivgO01FwrASnfpybLJGXiLxIM5QHhU6pnsjrgfUYX5xl4vSFtWlZYre1J0eYnNxgP1YTY4u8Q4kK5Rgjb+bTsRyhdu7d1y9xQuuZMxeszAh9h/MVKpGVhqODbZecEe05nGW7ZwVL+eiN2p1o5KotyhA1yKnFRx6JuHNH6Vd014MNGxfxKXVxNh43TNT8sHRB8G0cCon7ouS6K7h9I+uCS3H1tMC3PG+gzQrZtZFzA5erdtZ8f+lJazXyXxtB5xIZBpkYdfyVwBK1MREPw9XAUqJeweFRrJC6Sta6+lFXH+vqc139ri/f1dXXurqoq+919QUSavEgTk6grt7Xl5/q6hdZLfSCtjBmRDXlpLyG+vJDXX2zcX/oPBhIcYoSnh/sU5aF1nQAOkuwudX0foHyarAAtdQJE4am2mAcZyVSzU7aKbSFrQX3LOKnxRl+Dy3C1NAI2rmV/ZprMDLi7VQPQyfWQEyINxNJmSPXAU3aboZmuX22xzp+fkYAnxS0IbQOlD6jUw3tkaQz2Y7IhKQjfEmnU+1W7TBcD5rR+V9RXRsk5mKM5CDrX3Jfa8DC2N7ehvWZiA3UtIO+sRnrjYfrdS9+s8/odm4bxG0Gs+PlSN39/2bpGFJG/2QrVOS5L9pqRMaBkAxlD9aKCVCmlMGA5tRNbvNcCbmcGCV7MJKIfAFTxIyRjD1YXSkmi9E2wbKMWVqqHjw2bs8yI24pL0o9f7dEHu3oH4qZIazozoDQlRFSHbRavCim/wADnb0F</a:t>
+            </a:r>
             <a:endParaRPr lang="en-US" dirty="0"/>
           </a:p>
         </p:txBody>
@@ -1395,7 +1407,7 @@
             <a:fld id="{8BEEBAAA-29B5-4AF5-BC5F-7E580C29002D}" type="datetimeFigureOut">
               <a:rPr lang="en-US" smtClean="0"/>
               <a:pPr/>
-              <a:t>11/05/2026</a:t>
+              <a:t>12/05/2026</a:t>
             </a:fld>
             <a:endParaRPr lang="en-US" dirty="0"/>
           </a:p>
@@ -2021,7 +2033,7 @@
             <a:fld id="{8BEEBAAA-29B5-4AF5-BC5F-7E580C29002D}" type="datetimeFigureOut">
               <a:rPr lang="en-US" smtClean="0"/>
               <a:pPr/>
-              <a:t>11/05/2026</a:t>
+              <a:t>12/05/2026</a:t>
             </a:fld>
             <a:endParaRPr lang="en-US" dirty="0"/>
           </a:p>
@@ -4953,6 +4965,15 @@
 </file>
 
 <file path=customXml/item2.xml><?xml version="1.0" encoding="utf-8"?>
+<?mso-contentType ?>
+<FormTemplates xmlns="http://schemas.microsoft.com/sharepoint/v3/contenttype/forms">
+  <Display>DocumentLibraryForm</Display>
+  <Edit>DocumentLibraryForm</Edit>
+  <New>DocumentLibraryForm</New>
+</FormTemplates>
+</file>
+
+<file path=customXml/item3.xml><?xml version="1.0" encoding="utf-8"?>
 <ct:contentTypeSchema xmlns:ct="http://schemas.microsoft.com/office/2006/metadata/contentType" xmlns:ma="http://schemas.microsoft.com/office/2006/metadata/properties/metaAttributes" ct:_="" ma:_="" ma:contentTypeName="Document" ma:contentTypeID="0x01010079F111ED35F8CC479449609E8A0923A6" ma:contentTypeVersion="27" ma:contentTypeDescription="Create a new document." ma:contentTypeScope="" ma:versionID="c6f9a84f66a9c8b9a21755b9ffafb945">
   <xsd:schema xmlns:xsd="http://www.w3.org/2001/XMLSchema" xmlns:xs="http://www.w3.org/2001/XMLSchema" xmlns:p="http://schemas.microsoft.com/office/2006/metadata/properties" xmlns:ns1="http://schemas.microsoft.com/sharepoint/v3" xmlns:ns2="71af3243-3dd4-4a8d-8c0d-dd76da1f02a5" xmlns:ns3="16c05727-aa75-4e4a-9b5f-8a80a1165891" xmlns:ns4="230e9df3-be65-4c73-a93b-d1236ebd677e" targetNamespace="http://schemas.microsoft.com/office/2006/metadata/properties" ma:root="true" ma:fieldsID="27df39e3e7036dff54f89ddd5805ce72" ns1:_="" ns2:_="" ns3:_="" ns4:_="">
     <xsd:import namespace="http://schemas.microsoft.com/sharepoint/v3"/>
@@ -5258,15 +5279,6 @@
 </ct:contentTypeSchema>
 </file>
 
-<file path=customXml/item3.xml><?xml version="1.0" encoding="utf-8"?>
-<?mso-contentType ?>
-<FormTemplates xmlns="http://schemas.microsoft.com/sharepoint/v3/contenttype/forms">
-  <Display>DocumentLibraryForm</Display>
-  <Edit>DocumentLibraryForm</Edit>
-  <New>DocumentLibraryForm</New>
-</FormTemplates>
-</file>
-
 <file path=customXml/itemProps1.xml><?xml version="1.0" encoding="utf-8"?>
 <ds:datastoreItem xmlns:ds="http://schemas.openxmlformats.org/officeDocument/2006/customXml" ds:itemID="{5A3EE4EA-81C0-48D0-BEBD-A2EFD6B38B42}">
   <ds:schemaRefs>
@@ -5280,6 +5292,14 @@
 </file>
 
 <file path=customXml/itemProps2.xml><?xml version="1.0" encoding="utf-8"?>
+<ds:datastoreItem xmlns:ds="http://schemas.openxmlformats.org/officeDocument/2006/customXml" ds:itemID="{5563EE24-83AF-4B4D-B45B-11D1ECD4364A}">
+  <ds:schemaRefs>
+    <ds:schemaRef ds:uri="http://schemas.microsoft.com/sharepoint/v3/contenttype/forms"/>
+  </ds:schemaRefs>
+</ds:datastoreItem>
+</file>
+
+<file path=customXml/itemProps3.xml><?xml version="1.0" encoding="utf-8"?>
 <ds:datastoreItem xmlns:ds="http://schemas.openxmlformats.org/officeDocument/2006/customXml" ds:itemID="{B2FC9C26-AD58-4393-99DE-F67958CF6A29}">
   <ds:schemaRefs>
     <ds:schemaRef ds:uri="http://schemas.microsoft.com/office/2006/metadata/contentType"/>
@@ -5298,12 +5318,4 @@
     <ds:schemaRef ds:uri="http://schemas.microsoft.com/internal/obd"/>
   </ds:schemaRefs>
 </ds:datastoreItem>
-</file>
-
-<file path=customXml/itemProps3.xml><?xml version="1.0" encoding="utf-8"?>
-<ds:datastoreItem xmlns:ds="http://schemas.openxmlformats.org/officeDocument/2006/customXml" ds:itemID="{5563EE24-83AF-4B4D-B45B-11D1ECD4364A}">
-  <ds:schemaRefs>
-    <ds:schemaRef ds:uri="http://schemas.microsoft.com/sharepoint/v3/contenttype/forms"/>
-  </ds:schemaRefs>
-</ds:datastoreItem>
 </file>